--- a/decks/geog-resources/geog-resources_ch4_fracking.pptx
+++ b/decks/geog-resources/geog-resources_ch4_fracking.pptx
@@ -126,30 +126,30 @@
   <p:extLst>
     <p:ext uri="{521415D9-36F7-43E2-AB2F-B90AF26B5E84}">
       <p14:sectionLst xmlns:p14="http://schemas.microsoft.com/office/powerpoint/2010/main">
-        <p14:section name="Opening" id="{9b9a251e-c90a-b045-be0e-278fd9b3fec3}">
+        <p14:section name="Opening" id="{e4892650-23d3-49a5-1894-8f4301a3777c}">
           <p14:sldIdLst>
             <p14:sldId id="256"/>
           </p14:sldIdLst>
         </p14:section>
-        <p14:section name="Gate" id="{f049c757-2eab-8eee-ddb4-4a7866583ad9}">
+        <p14:section name="Gate" id="{5a99f6dc-1c07-ec81-87b9-f7b78127ca6b}">
           <p14:sldIdLst>
             <p14:sldId id="257"/>
             <p14:sldId id="258"/>
           </p14:sldIdLst>
         </p14:section>
-        <p14:section name="Pre-teach" id="{c6587cca-20a3-91f5-deff-a6c915c9e921}">
+        <p14:section name="Pre-teach" id="{a1333892-d49c-9ab7-4e02-d9f20b030338}">
           <p14:sldIdLst>
             <p14:sldId id="259"/>
             <p14:sldId id="260"/>
           </p14:sldIdLst>
         </p14:section>
-        <p14:section name="Read-along" id="{cbd84cf8-e6b1-e67b-bc44-4b860307a2de}">
+        <p14:section name="Read-along" id="{b23530aa-2a06-39fa-12e1-206f6c709b94}">
           <p14:sldIdLst>
             <p14:sldId id="261"/>
             <p14:sldId id="262"/>
           </p14:sldIdLst>
         </p14:section>
-        <p14:section name="Teach" id="{fd59b9f6-e740-ea47-ac4a-573723a3846e}">
+        <p14:section name="Teach" id="{da2ab841-de79-af37-4198-e14da1939649}">
           <p14:sldIdLst>
             <p14:sldId id="263"/>
             <p14:sldId id="264"/>
@@ -158,7 +158,7 @@
             <p14:sldId id="267"/>
           </p14:sldIdLst>
         </p14:section>
-        <p14:section name="Routes" id="{5e38ac3a-3228-c716-147e-08389b9b6e5d}">
+        <p14:section name="Routes" id="{0b2543c5-f2b7-0b1e-3910-2fd378ffb5b6}">
           <p14:sldIdLst>
             <p14:sldId id="268"/>
             <p14:sldId id="269"/>
@@ -166,12 +166,12 @@
             <p14:sldId id="271"/>
           </p14:sldIdLst>
         </p14:section>
-        <p14:section name="Close" id="{c0d08302-9442-314e-7bf5-8beaeecd7cc0}">
+        <p14:section name="Close" id="{a47bbbb4-de2d-a6f3-4948-6d038f25c2d1}">
           <p14:sldIdLst>
             <p14:sldId id="272"/>
           </p14:sldIdLst>
         </p14:section>
-        <p14:section name="Answers" id="{1766f529-da42-84d1-cf47-3c8f21ce02d3}">
+        <p14:section name="Answers" id="{fe1f6ac0-8637-d2cd-12cb-c6a9ef034b69}">
           <p14:sldIdLst>
             <p14:sldId id="273"/>
             <p14:sldId id="274"/>
